--- a/public/fun/pack/pptx/family/가족소개_13_3대가족_오월숲길.pptx
+++ b/public/fun/pack/pptx/family/가족소개_13_3대가족_오월숲길.pptx
@@ -3347,7 +3347,7 @@
             <a:r>
               <a:rPr sz="3600" b="1" i="0">
                 <a:solidFill>
-                  <a:srgbClr val="143D21"/>
+                  <a:srgbClr val="1D7236"/>
                 </a:solidFill>
               </a:rPr>
               <a:t>우리 가족을 소개합니다</a:t>
@@ -3385,7 +3385,7 @@
             <a:r>
               <a:rPr sz="1700" b="0" i="1">
                 <a:solidFill>
-                  <a:srgbClr val="143D21"/>
+                  <a:srgbClr val="1D7236"/>
                 </a:solidFill>
               </a:rPr>
               <a:t>도시락 싸 들고 오월 숲길로</a:t>
@@ -3445,7 +3445,7 @@
     <p:bg>
       <p:bgPr>
         <a:solidFill>
-          <a:srgbClr val="D0F1DA"/>
+          <a:srgbClr val="D4F7DE"/>
         </a:solidFill>
         <a:effectLst/>
       </p:bgPr>
@@ -3476,7 +3476,7 @@
           </a:solidFill>
           <a:ln w="25400">
             <a:solidFill>
-              <a:srgbClr val="2B8245"/>
+              <a:srgbClr val="43D66F"/>
             </a:solidFill>
             <a:prstDash val="dash"/>
           </a:ln>
@@ -3519,7 +3519,7 @@
             <a:r>
               <a:rPr sz="3000" b="1" i="0">
                 <a:solidFill>
-                  <a:srgbClr val="143D21"/>
+                  <a:srgbClr val="1D7236"/>
                 </a:solidFill>
               </a:rPr>
               <a:t>가족 구성원</a:t>
@@ -3542,11 +3542,11 @@
             <a:avLst/>
           </a:prstGeom>
           <a:solidFill>
-            <a:srgbClr val="D0F1DA"/>
+            <a:srgbClr val="D4F7DE"/>
           </a:solidFill>
           <a:ln w="19050">
             <a:solidFill>
-              <a:srgbClr val="2B8245"/>
+              <a:srgbClr val="43D66F"/>
             </a:solidFill>
             <a:prstDash val="dash"/>
           </a:ln>
@@ -3565,7 +3565,7 @@
             <a:r>
               <a:rPr sz="1200" b="0" i="0">
                 <a:solidFill>
-                  <a:srgbClr val="143D21"/>
+                  <a:srgbClr val="1D7236"/>
                 </a:solidFill>
               </a:rPr>
               <a:t>사진</a:t>
@@ -3603,7 +3603,7 @@
             <a:r>
               <a:rPr sz="1600" b="1" i="0">
                 <a:solidFill>
-                  <a:srgbClr val="143D21"/>
+                  <a:srgbClr val="1D7236"/>
                 </a:solidFill>
               </a:rPr>
               <a:t>할아버지</a:t>
@@ -3694,11 +3694,11 @@
             <a:avLst/>
           </a:prstGeom>
           <a:solidFill>
-            <a:srgbClr val="D0F1DA"/>
+            <a:srgbClr val="D4F7DE"/>
           </a:solidFill>
           <a:ln w="19050">
             <a:solidFill>
-              <a:srgbClr val="2B8245"/>
+              <a:srgbClr val="43D66F"/>
             </a:solidFill>
             <a:prstDash val="dash"/>
           </a:ln>
@@ -3717,7 +3717,7 @@
             <a:r>
               <a:rPr sz="1200" b="0" i="0">
                 <a:solidFill>
-                  <a:srgbClr val="143D21"/>
+                  <a:srgbClr val="1D7236"/>
                 </a:solidFill>
               </a:rPr>
               <a:t>사진</a:t>
@@ -3755,7 +3755,7 @@
             <a:r>
               <a:rPr sz="1600" b="1" i="0">
                 <a:solidFill>
-                  <a:srgbClr val="143D21"/>
+                  <a:srgbClr val="1D7236"/>
                 </a:solidFill>
               </a:rPr>
               <a:t>할머니</a:t>
@@ -3846,11 +3846,11 @@
             <a:avLst/>
           </a:prstGeom>
           <a:solidFill>
-            <a:srgbClr val="D0F1DA"/>
+            <a:srgbClr val="D4F7DE"/>
           </a:solidFill>
           <a:ln w="19050">
             <a:solidFill>
-              <a:srgbClr val="2B8245"/>
+              <a:srgbClr val="43D66F"/>
             </a:solidFill>
             <a:prstDash val="dash"/>
           </a:ln>
@@ -3869,7 +3869,7 @@
             <a:r>
               <a:rPr sz="1200" b="0" i="0">
                 <a:solidFill>
-                  <a:srgbClr val="143D21"/>
+                  <a:srgbClr val="1D7236"/>
                 </a:solidFill>
               </a:rPr>
               <a:t>사진</a:t>
@@ -3907,7 +3907,7 @@
             <a:r>
               <a:rPr sz="1600" b="1" i="0">
                 <a:solidFill>
-                  <a:srgbClr val="143D21"/>
+                  <a:srgbClr val="1D7236"/>
                 </a:solidFill>
               </a:rPr>
               <a:t>아빠</a:t>
@@ -3998,11 +3998,11 @@
             <a:avLst/>
           </a:prstGeom>
           <a:solidFill>
-            <a:srgbClr val="D0F1DA"/>
+            <a:srgbClr val="D4F7DE"/>
           </a:solidFill>
           <a:ln w="19050">
             <a:solidFill>
-              <a:srgbClr val="2B8245"/>
+              <a:srgbClr val="43D66F"/>
             </a:solidFill>
             <a:prstDash val="dash"/>
           </a:ln>
@@ -4021,7 +4021,7 @@
             <a:r>
               <a:rPr sz="1200" b="0" i="0">
                 <a:solidFill>
-                  <a:srgbClr val="143D21"/>
+                  <a:srgbClr val="1D7236"/>
                 </a:solidFill>
               </a:rPr>
               <a:t>사진</a:t>
@@ -4059,7 +4059,7 @@
             <a:r>
               <a:rPr sz="1600" b="1" i="0">
                 <a:solidFill>
-                  <a:srgbClr val="143D21"/>
+                  <a:srgbClr val="1D7236"/>
                 </a:solidFill>
               </a:rPr>
               <a:t>엄마</a:t>
@@ -4150,11 +4150,11 @@
             <a:avLst/>
           </a:prstGeom>
           <a:solidFill>
-            <a:srgbClr val="D0F1DA"/>
+            <a:srgbClr val="D4F7DE"/>
           </a:solidFill>
           <a:ln w="19050">
             <a:solidFill>
-              <a:srgbClr val="2B8245"/>
+              <a:srgbClr val="43D66F"/>
             </a:solidFill>
             <a:prstDash val="dash"/>
           </a:ln>
@@ -4173,7 +4173,7 @@
             <a:r>
               <a:rPr sz="1200" b="0" i="0">
                 <a:solidFill>
-                  <a:srgbClr val="143D21"/>
+                  <a:srgbClr val="1D7236"/>
                 </a:solidFill>
               </a:rPr>
               <a:t>사진</a:t>
@@ -4211,7 +4211,7 @@
             <a:r>
               <a:rPr sz="1600" b="1" i="0">
                 <a:solidFill>
-                  <a:srgbClr val="143D21"/>
+                  <a:srgbClr val="1D7236"/>
                 </a:solidFill>
               </a:rPr>
               <a:t>큰아이</a:t>
@@ -4302,11 +4302,11 @@
             <a:avLst/>
           </a:prstGeom>
           <a:solidFill>
-            <a:srgbClr val="D0F1DA"/>
+            <a:srgbClr val="D4F7DE"/>
           </a:solidFill>
           <a:ln w="19050">
             <a:solidFill>
-              <a:srgbClr val="2B8245"/>
+              <a:srgbClr val="43D66F"/>
             </a:solidFill>
             <a:prstDash val="dash"/>
           </a:ln>
@@ -4325,7 +4325,7 @@
             <a:r>
               <a:rPr sz="1200" b="0" i="0">
                 <a:solidFill>
-                  <a:srgbClr val="143D21"/>
+                  <a:srgbClr val="1D7236"/>
                 </a:solidFill>
               </a:rPr>
               <a:t>사진</a:t>
@@ -4363,7 +4363,7 @@
             <a:r>
               <a:rPr sz="1600" b="1" i="0">
                 <a:solidFill>
-                  <a:srgbClr val="143D21"/>
+                  <a:srgbClr val="1D7236"/>
                 </a:solidFill>
               </a:rPr>
               <a:t>작은아이</a:t>
@@ -4453,7 +4453,7 @@
     <p:bg>
       <p:bgPr>
         <a:solidFill>
-          <a:srgbClr val="D0F1DA"/>
+          <a:srgbClr val="D4F7DE"/>
         </a:solidFill>
         <a:effectLst/>
       </p:bgPr>
@@ -4484,7 +4484,7 @@
           </a:solidFill>
           <a:ln w="25400">
             <a:solidFill>
-              <a:srgbClr val="2B8245"/>
+              <a:srgbClr val="43D66F"/>
             </a:solidFill>
             <a:prstDash val="dash"/>
           </a:ln>
@@ -4527,7 +4527,7 @@
             <a:r>
               <a:rPr sz="3000" b="1" i="0">
                 <a:solidFill>
-                  <a:srgbClr val="143D21"/>
+                  <a:srgbClr val="1D7236"/>
                 </a:solidFill>
               </a:rPr>
               <a:t>우리 가족 이야기</a:t>
@@ -4550,7 +4550,7 @@
             <a:avLst/>
           </a:prstGeom>
           <a:solidFill>
-            <a:srgbClr val="D0F1DA"/>
+            <a:srgbClr val="D4F7DE"/>
           </a:solidFill>
           <a:ln>
             <a:noFill/>
@@ -4579,7 +4579,7 @@
             <a:avLst/>
           </a:prstGeom>
           <a:solidFill>
-            <a:srgbClr val="2B8245"/>
+            <a:srgbClr val="43D66F"/>
           </a:solidFill>
           <a:ln w="38100">
             <a:solidFill>
@@ -4625,7 +4625,7 @@
             <a:r>
               <a:rPr sz="1600" b="1" i="0">
                 <a:solidFill>
-                  <a:srgbClr val="2B8245"/>
+                  <a:srgbClr val="43D66F"/>
                 </a:solidFill>
               </a:rPr>
               <a:t>할아버지 할머니의 이야기</a:t>
@@ -4663,7 +4663,7 @@
             <a:r>
               <a:rPr sz="1800" b="1" i="0">
                 <a:solidFill>
-                  <a:srgbClr val="143D21"/>
+                  <a:srgbClr val="1D7236"/>
                 </a:solidFill>
               </a:rPr>
               <a:t>뿌리</a:t>
@@ -4724,7 +4724,7 @@
             <a:avLst/>
           </a:prstGeom>
           <a:solidFill>
-            <a:srgbClr val="2B8245"/>
+            <a:srgbClr val="43D66F"/>
           </a:solidFill>
           <a:ln w="38100">
             <a:solidFill>
@@ -4770,7 +4770,7 @@
             <a:r>
               <a:rPr sz="1600" b="1" i="0">
                 <a:solidFill>
-                  <a:srgbClr val="2B8245"/>
+                  <a:srgbClr val="43D66F"/>
                 </a:solidFill>
               </a:rPr>
               <a:t>부모가 된 날</a:t>
@@ -4808,7 +4808,7 @@
             <a:r>
               <a:rPr sz="1800" b="1" i="0">
                 <a:solidFill>
-                  <a:srgbClr val="143D21"/>
+                  <a:srgbClr val="1D7236"/>
                 </a:solidFill>
               </a:rPr>
               <a:t>새로운 가지</a:t>
@@ -4869,7 +4869,7 @@
             <a:avLst/>
           </a:prstGeom>
           <a:solidFill>
-            <a:srgbClr val="2B8245"/>
+            <a:srgbClr val="43D66F"/>
           </a:solidFill>
           <a:ln w="38100">
             <a:solidFill>
@@ -4915,7 +4915,7 @@
             <a:r>
               <a:rPr sz="1600" b="1" i="0">
                 <a:solidFill>
-                  <a:srgbClr val="2B8245"/>
+                  <a:srgbClr val="43D66F"/>
                 </a:solidFill>
               </a:rPr>
               <a:t>온 가족 모임</a:t>
@@ -4953,7 +4953,7 @@
             <a:r>
               <a:rPr sz="1800" b="1" i="0">
                 <a:solidFill>
-                  <a:srgbClr val="143D21"/>
+                  <a:srgbClr val="1D7236"/>
                 </a:solidFill>
               </a:rPr>
               <a:t>한자리에 모인 날</a:t>
@@ -5014,7 +5014,7 @@
             <a:avLst/>
           </a:prstGeom>
           <a:solidFill>
-            <a:srgbClr val="2B8245"/>
+            <a:srgbClr val="43D66F"/>
           </a:solidFill>
           <a:ln w="38100">
             <a:solidFill>
@@ -5060,7 +5060,7 @@
             <a:r>
               <a:rPr sz="1600" b="1" i="0">
                 <a:solidFill>
-                  <a:srgbClr val="2B8245"/>
+                  <a:srgbClr val="43D66F"/>
                 </a:solidFill>
               </a:rPr>
               <a:t>지금</a:t>
@@ -5098,7 +5098,7 @@
             <a:r>
               <a:rPr sz="1800" b="1" i="0">
                 <a:solidFill>
-                  <a:srgbClr val="143D21"/>
+                  <a:srgbClr val="1D7236"/>
                 </a:solidFill>
               </a:rPr>
               <a:t>오늘의 우리</a:t>
@@ -5158,7 +5158,7 @@
     <p:bg>
       <p:bgPr>
         <a:solidFill>
-          <a:srgbClr val="D0F1DA"/>
+          <a:srgbClr val="D4F7DE"/>
         </a:solidFill>
         <a:effectLst/>
       </p:bgPr>
@@ -5189,7 +5189,7 @@
           </a:solidFill>
           <a:ln w="25400">
             <a:solidFill>
-              <a:srgbClr val="2B8245"/>
+              <a:srgbClr val="43D66F"/>
             </a:solidFill>
             <a:prstDash val="dash"/>
           </a:ln>
@@ -5232,7 +5232,7 @@
             <a:r>
               <a:rPr sz="3000" b="1" i="0">
                 <a:solidFill>
-                  <a:srgbClr val="143D21"/>
+                  <a:srgbClr val="1D7236"/>
                 </a:solidFill>
               </a:rPr>
               <a:t>우리 가족의 약속</a:t>
@@ -5257,11 +5257,11 @@
             </a:avLst>
           </a:prstGeom>
           <a:solidFill>
-            <a:srgbClr val="F0FAF3"/>
+            <a:srgbClr val="F3FCF6"/>
           </a:solidFill>
           <a:ln w="12700">
             <a:solidFill>
-              <a:srgbClr val="D0F1DA"/>
+              <a:srgbClr val="D4F7DE"/>
             </a:solidFill>
           </a:ln>
         </p:spPr>
@@ -5288,7 +5288,7 @@
             <a:avLst/>
           </a:prstGeom>
           <a:solidFill>
-            <a:srgbClr val="2B8245"/>
+            <a:srgbClr val="43D66F"/>
           </a:solidFill>
           <a:ln>
             <a:noFill/>
@@ -5346,7 +5346,7 @@
             <a:r>
               <a:rPr sz="1800" b="1" i="0">
                 <a:solidFill>
-                  <a:srgbClr val="143D21"/>
+                  <a:srgbClr val="1D7236"/>
                 </a:solidFill>
               </a:rPr>
               <a:t>약속 1</a:t>
@@ -5409,11 +5409,11 @@
             </a:avLst>
           </a:prstGeom>
           <a:solidFill>
-            <a:srgbClr val="F0FAF3"/>
+            <a:srgbClr val="F3FCF6"/>
           </a:solidFill>
           <a:ln w="12700">
             <a:solidFill>
-              <a:srgbClr val="D0F1DA"/>
+              <a:srgbClr val="D4F7DE"/>
             </a:solidFill>
           </a:ln>
         </p:spPr>
@@ -5440,7 +5440,7 @@
             <a:avLst/>
           </a:prstGeom>
           <a:solidFill>
-            <a:srgbClr val="2B8245"/>
+            <a:srgbClr val="43D66F"/>
           </a:solidFill>
           <a:ln>
             <a:noFill/>
@@ -5498,7 +5498,7 @@
             <a:r>
               <a:rPr sz="1800" b="1" i="0">
                 <a:solidFill>
-                  <a:srgbClr val="143D21"/>
+                  <a:srgbClr val="1D7236"/>
                 </a:solidFill>
               </a:rPr>
               <a:t>약속 2</a:t>
@@ -5561,11 +5561,11 @@
             </a:avLst>
           </a:prstGeom>
           <a:solidFill>
-            <a:srgbClr val="F0FAF3"/>
+            <a:srgbClr val="F3FCF6"/>
           </a:solidFill>
           <a:ln w="12700">
             <a:solidFill>
-              <a:srgbClr val="D0F1DA"/>
+              <a:srgbClr val="D4F7DE"/>
             </a:solidFill>
           </a:ln>
         </p:spPr>
@@ -5592,7 +5592,7 @@
             <a:avLst/>
           </a:prstGeom>
           <a:solidFill>
-            <a:srgbClr val="2B8245"/>
+            <a:srgbClr val="43D66F"/>
           </a:solidFill>
           <a:ln>
             <a:noFill/>
@@ -5650,7 +5650,7 @@
             <a:r>
               <a:rPr sz="1800" b="1" i="0">
                 <a:solidFill>
-                  <a:srgbClr val="143D21"/>
+                  <a:srgbClr val="1D7236"/>
                 </a:solidFill>
               </a:rPr>
               <a:t>약속 3</a:t>
@@ -5710,7 +5710,7 @@
     <p:bg>
       <p:bgPr>
         <a:solidFill>
-          <a:srgbClr val="D0F1DA"/>
+          <a:srgbClr val="D4F7DE"/>
         </a:solidFill>
         <a:effectLst/>
       </p:bgPr>
@@ -5741,7 +5741,7 @@
           </a:solidFill>
           <a:ln w="25400">
             <a:solidFill>
-              <a:srgbClr val="2B8245"/>
+              <a:srgbClr val="43D66F"/>
             </a:solidFill>
             <a:prstDash val="dash"/>
           </a:ln>
@@ -5784,7 +5784,7 @@
             <a:r>
               <a:rPr sz="3000" b="1" i="0">
                 <a:solidFill>
-                  <a:srgbClr val="143D21"/>
+                  <a:srgbClr val="1D7236"/>
                 </a:solidFill>
               </a:rPr>
               <a:t>가족 사진</a:t>
@@ -5809,11 +5809,11 @@
             </a:avLst>
           </a:prstGeom>
           <a:solidFill>
-            <a:srgbClr val="D0F1DA"/>
+            <a:srgbClr val="D4F7DE"/>
           </a:solidFill>
           <a:ln w="19050">
             <a:solidFill>
-              <a:srgbClr val="2B8245"/>
+              <a:srgbClr val="43D66F"/>
             </a:solidFill>
             <a:prstDash val="dash"/>
           </a:ln>
@@ -5832,7 +5832,7 @@
             <a:r>
               <a:rPr sz="1200" b="0" i="0">
                 <a:solidFill>
-                  <a:srgbClr val="143D21"/>
+                  <a:srgbClr val="1D7236"/>
                 </a:solidFill>
               </a:rPr>
               <a:t>사진 1</a:t>
@@ -5857,11 +5857,11 @@
             </a:avLst>
           </a:prstGeom>
           <a:solidFill>
-            <a:srgbClr val="D0F1DA"/>
+            <a:srgbClr val="D4F7DE"/>
           </a:solidFill>
           <a:ln w="19050">
             <a:solidFill>
-              <a:srgbClr val="2B8245"/>
+              <a:srgbClr val="43D66F"/>
             </a:solidFill>
             <a:prstDash val="dash"/>
           </a:ln>
@@ -5880,7 +5880,7 @@
             <a:r>
               <a:rPr sz="1200" b="0" i="0">
                 <a:solidFill>
-                  <a:srgbClr val="143D21"/>
+                  <a:srgbClr val="1D7236"/>
                 </a:solidFill>
               </a:rPr>
               <a:t>사진 2</a:t>
@@ -5905,11 +5905,11 @@
             </a:avLst>
           </a:prstGeom>
           <a:solidFill>
-            <a:srgbClr val="D0F1DA"/>
+            <a:srgbClr val="D4F7DE"/>
           </a:solidFill>
           <a:ln w="19050">
             <a:solidFill>
-              <a:srgbClr val="2B8245"/>
+              <a:srgbClr val="43D66F"/>
             </a:solidFill>
             <a:prstDash val="dash"/>
           </a:ln>
@@ -5928,7 +5928,7 @@
             <a:r>
               <a:rPr sz="1200" b="0" i="0">
                 <a:solidFill>
-                  <a:srgbClr val="143D21"/>
+                  <a:srgbClr val="1D7236"/>
                 </a:solidFill>
               </a:rPr>
               <a:t>사진 3</a:t>
@@ -5953,11 +5953,11 @@
             </a:avLst>
           </a:prstGeom>
           <a:solidFill>
-            <a:srgbClr val="D0F1DA"/>
+            <a:srgbClr val="D4F7DE"/>
           </a:solidFill>
           <a:ln w="19050">
             <a:solidFill>
-              <a:srgbClr val="2B8245"/>
+              <a:srgbClr val="43D66F"/>
             </a:solidFill>
             <a:prstDash val="dash"/>
           </a:ln>
@@ -5976,7 +5976,7 @@
             <a:r>
               <a:rPr sz="1200" b="0" i="0">
                 <a:solidFill>
-                  <a:srgbClr val="143D21"/>
+                  <a:srgbClr val="1D7236"/>
                 </a:solidFill>
               </a:rPr>
               <a:t>사진 4</a:t>
@@ -6001,11 +6001,11 @@
             </a:avLst>
           </a:prstGeom>
           <a:solidFill>
-            <a:srgbClr val="D0F1DA"/>
+            <a:srgbClr val="D4F7DE"/>
           </a:solidFill>
           <a:ln w="19050">
             <a:solidFill>
-              <a:srgbClr val="2B8245"/>
+              <a:srgbClr val="43D66F"/>
             </a:solidFill>
             <a:prstDash val="dash"/>
           </a:ln>
@@ -6024,7 +6024,7 @@
             <a:r>
               <a:rPr sz="1200" b="0" i="0">
                 <a:solidFill>
-                  <a:srgbClr val="143D21"/>
+                  <a:srgbClr val="1D7236"/>
                 </a:solidFill>
               </a:rPr>
               <a:t>사진 5</a:t>
@@ -6049,11 +6049,11 @@
             </a:avLst>
           </a:prstGeom>
           <a:solidFill>
-            <a:srgbClr val="D0F1DA"/>
+            <a:srgbClr val="D4F7DE"/>
           </a:solidFill>
           <a:ln w="19050">
             <a:solidFill>
-              <a:srgbClr val="2B8245"/>
+              <a:srgbClr val="43D66F"/>
             </a:solidFill>
             <a:prstDash val="dash"/>
           </a:ln>
@@ -6072,7 +6072,7 @@
             <a:r>
               <a:rPr sz="1200" b="0" i="0">
                 <a:solidFill>
-                  <a:srgbClr val="143D21"/>
+                  <a:srgbClr val="1D7236"/>
                 </a:solidFill>
               </a:rPr>
               <a:t>사진 6</a:t>
@@ -6152,7 +6152,7 @@
             <a:r>
               <a:rPr sz="3600" b="1" i="0">
                 <a:solidFill>
-                  <a:srgbClr val="143D21"/>
+                  <a:srgbClr val="1D7236"/>
                 </a:solidFill>
               </a:rPr>
               <a:t>우리 가족 소개를 마칩니다</a:t>
@@ -6190,7 +6190,7 @@
             <a:r>
               <a:rPr sz="1700" b="0" i="1">
                 <a:solidFill>
-                  <a:srgbClr val="143D21"/>
+                  <a:srgbClr val="1D7236"/>
                 </a:solidFill>
               </a:rPr>
               <a:t>읽어 주셔서 고맙습니다</a:t>
@@ -6255,34 +6255,34 @@
         <a:sysClr val="window" lastClr="FFFFFF"/>
       </a:lt1>
       <a:dk2>
-        <a:srgbClr val="143D21"/>
+        <a:srgbClr val="1D7236"/>
       </a:dk2>
       <a:lt2>
-        <a:srgbClr val="F0FAF3"/>
+        <a:srgbClr val="F3FCF6"/>
       </a:lt2>
       <a:accent1>
-        <a:srgbClr val="2B8245"/>
+        <a:srgbClr val="43D66F"/>
       </a:accent1>
       <a:accent2>
-        <a:srgbClr val="803B91"/>
+        <a:srgbClr val="339941"/>
       </a:accent2>
       <a:accent3>
-        <a:srgbClr val="143D21"/>
+        <a:srgbClr val="1D7236"/>
       </a:accent3>
       <a:accent4>
-        <a:srgbClr val="D0F1DA"/>
+        <a:srgbClr val="D4F7DE"/>
       </a:accent4>
       <a:accent5>
-        <a:srgbClr val="565E6B"/>
+        <a:srgbClr val="3BB858"/>
       </a:accent5>
       <a:accent6>
-        <a:srgbClr val="728B7A"/>
+        <a:srgbClr val="77AA86"/>
       </a:accent6>
       <a:hlink>
-        <a:srgbClr val="2B8245"/>
+        <a:srgbClr val="43D66F"/>
       </a:hlink>
       <a:folHlink>
-        <a:srgbClr val="143D21"/>
+        <a:srgbClr val="1D7236"/>
       </a:folHlink>
     </a:clrScheme>
     <a:fontScheme name="Office">
